--- a/classes/parte-9-forense-digital-y-respuesta-a-incidentes/205-analisis-de-artefactos-de-windows/clase-205-presentacion.pptx
+++ b/classes/parte-9-forense-digital-y-respuesta-a-incidentes/205-analisis-de-artefactos-de-windows/clase-205-presentacion.pptx
@@ -17,6 +17,11 @@
     <p:sldId id="265" r:id="rId16"/>
     <p:sldId id="266" r:id="rId17"/>
     <p:sldId id="267" r:id="rId18"/>
+    <p:sldId id="268" r:id="rId19"/>
+    <p:sldId id="269" r:id="rId20"/>
+    <p:sldId id="270" r:id="rId21"/>
+    <p:sldId id="271" r:id="rId22"/>
+    <p:sldId id="272" r:id="rId23"/>
   </p:sldIdLst>
   <p:sldSz cx="9144000" cy="6858000" type="screen4x3"/>
   <p:notesSz cx="6858000" cy="9144000"/>
@@ -3198,7 +3203,7 @@
                   <a:srgbClr val="0B3D2E"/>
                 </a:solidFill>
               </a:rPr>
-              <a:t>⚠️ Errores comunes</a:t>
+              <a:t>🧰 Herramientas y preparación</a:t>
             </a:r>
           </a:p>
         </p:txBody>
@@ -3236,67 +3241,52 @@
                   <a:srgbClr val="22282E"/>
                 </a:solidFill>
               </a:rPr>
-              <a:t>•  No hay Prefetch — Prefetch deshabilitado (común en servidores/SSD). Usa ShimCache/AmCache.</a:t>
-            </a:r>
-          </a:p>
-          <a:p>
-            <a:pPr>
-              <a:spcAft>
-                <a:spcPts val="600"/>
-              </a:spcAft>
-            </a:pPr>
-            <a:r>
-              <a:rPr sz="1500">
-                <a:solidFill>
-                  <a:srgbClr val="22282E"/>
-                </a:solidFill>
-              </a:rPr>
-              <a:t>•  ShimCache "desordenada" — Su orden no es estrictamente cronológico. No infieras tiempos exactos de ahí.</a:t>
-            </a:r>
-          </a:p>
-          <a:p>
-            <a:pPr>
-              <a:spcAft>
-                <a:spcPts val="600"/>
-              </a:spcAft>
-            </a:pPr>
-            <a:r>
-              <a:rPr sz="1500">
-                <a:solidFill>
-                  <a:srgbClr val="22282E"/>
-                </a:solidFill>
-              </a:rPr>
-              <a:t>•  Event Logs vacíos — Rotación o borrado. Busca en backups o en SIEM.</a:t>
-            </a:r>
-          </a:p>
-          <a:p>
-            <a:pPr>
-              <a:spcAft>
-                <a:spcPts val="600"/>
-              </a:spcAft>
-            </a:pPr>
-            <a:r>
-              <a:rPr sz="1500">
-                <a:solidFill>
-                  <a:srgbClr val="22282E"/>
-                </a:solidFill>
-              </a:rPr>
-              <a:t>•  Registry Explorer no abre el hive — Hive en uso o corrupto. Extrae la copia offline de la imagen.</a:t>
-            </a:r>
-          </a:p>
-          <a:p>
-            <a:pPr>
-              <a:spcAft>
-                <a:spcPts val="600"/>
-              </a:spcAft>
-            </a:pPr>
-            <a:r>
-              <a:rPr sz="1500">
-                <a:solidFill>
-                  <a:srgbClr val="22282E"/>
-                </a:solidFill>
-              </a:rPr>
-              <a:t>•  Timestamps en hora local confusa — Convierte todo a UTC con la zona horaria del sistema (hive SYSTEM).</a:t>
+              <a:t>•  Eric Zimmerman's Tools: PECmd (Prefetch), AppCompatCacheParser, AmcacheParser, JLECmd, LECmd, SBECmd, EvtxECmd, Registry Explorer.</a:t>
+            </a:r>
+          </a:p>
+          <a:p>
+            <a:pPr>
+              <a:spcAft>
+                <a:spcPts val="600"/>
+              </a:spcAft>
+            </a:pPr>
+            <a:r>
+              <a:rPr sz="1500">
+                <a:solidFill>
+                  <a:srgbClr val="22282E"/>
+                </a:solidFill>
+              </a:rPr>
+              <a:t>•  RegRipper: parseo masivo de hives.</a:t>
+            </a:r>
+          </a:p>
+          <a:p>
+            <a:pPr>
+              <a:spcAft>
+                <a:spcPts val="600"/>
+              </a:spcAft>
+            </a:pPr>
+            <a:r>
+              <a:rPr sz="1500">
+                <a:solidFill>
+                  <a:srgbClr val="22282E"/>
+                </a:solidFill>
+              </a:rPr>
+              <a:t>•  Extracción: FTK Imager o KAPE para volcar los artefactos de una imagen montada en solo lectura.</a:t>
+            </a:r>
+          </a:p>
+          <a:p>
+            <a:pPr>
+              <a:spcAft>
+                <a:spcPts val="600"/>
+              </a:spcAft>
+            </a:pPr>
+            <a:r>
+              <a:rPr sz="1500">
+                <a:solidFill>
+                  <a:srgbClr val="22282E"/>
+                </a:solidFill>
+              </a:rPr>
+              <a:t>•  Entorno: usa una imagen de una VM Windows PROPIA donde tú generaste la actividad.</a:t>
             </a:r>
           </a:p>
         </p:txBody>
@@ -3347,7 +3337,7 @@
                   <a:srgbClr val="0B3D2E"/>
                 </a:solidFill>
               </a:rPr>
-              <a:t>❓ Preguntas frecuentes</a:t>
+              <a:t>🧪 Laboratorio guiado</a:t>
             </a:r>
           </a:p>
         </p:txBody>
@@ -3385,97 +3375,97 @@
                   <a:srgbClr val="22282E"/>
                 </a:solidFill>
               </a:rPr>
-              <a:t>•  ❓ ¿Prefetch prueba ejecución?</a:t>
-            </a:r>
-          </a:p>
-          <a:p>
-            <a:pPr>
-              <a:spcAft>
-                <a:spcPts val="600"/>
-              </a:spcAft>
-            </a:pPr>
-            <a:r>
-              <a:rPr sz="1500">
-                <a:solidFill>
-                  <a:srgbClr val="22282E"/>
-                </a:solidFill>
-              </a:rPr>
-              <a:t>•  Sí: su existencia indica que el programa se ejecutó, con conteo y última fecha. Ausencia no prueba lo contrario.</a:t>
-            </a:r>
-          </a:p>
-          <a:p>
-            <a:pPr>
-              <a:spcAft>
-                <a:spcPts val="600"/>
-              </a:spcAft>
-            </a:pPr>
-            <a:r>
-              <a:rPr sz="1500">
-                <a:solidFill>
-                  <a:srgbClr val="22282E"/>
-                </a:solidFill>
-              </a:rPr>
-              <a:t>•  ❓ ¿AmCache tiene hashes?</a:t>
-            </a:r>
-          </a:p>
-          <a:p>
-            <a:pPr>
-              <a:spcAft>
-                <a:spcPts val="600"/>
-              </a:spcAft>
-            </a:pPr>
-            <a:r>
-              <a:rPr sz="1500">
-                <a:solidFill>
-                  <a:srgbClr val="22282E"/>
-                </a:solidFill>
-              </a:rPr>
-              <a:t>•  Sí, SHA-1 de ejecutables, muy útil para contrastar contra inteligencia de amenazas.</a:t>
-            </a:r>
-          </a:p>
-          <a:p>
-            <a:pPr>
-              <a:spcAft>
-                <a:spcPts val="600"/>
-              </a:spcAft>
-            </a:pPr>
-            <a:r>
-              <a:rPr sz="1500">
-                <a:solidFill>
-                  <a:srgbClr val="22282E"/>
-                </a:solidFill>
-              </a:rPr>
-              <a:t>•  ❓ ¿Qué hive tiene la actividad del usuario?</a:t>
-            </a:r>
-          </a:p>
-          <a:p>
-            <a:pPr>
-              <a:spcAft>
-                <a:spcPts val="600"/>
-              </a:spcAft>
-            </a:pPr>
-            <a:r>
-              <a:rPr sz="1500">
-                <a:solidFill>
-                  <a:srgbClr val="22282E"/>
-                </a:solidFill>
-              </a:rPr>
-              <a:t>•  NTUSER.DAT (por perfil) y UsrClass.dat (ShellBags). SYSTEM/SOFTWARE son de máquina.</a:t>
-            </a:r>
-          </a:p>
-          <a:p>
-            <a:pPr>
-              <a:spcAft>
-                <a:spcPts val="600"/>
-              </a:spcAft>
-            </a:pPr>
-            <a:r>
-              <a:rPr sz="1500">
-                <a:solidFill>
-                  <a:srgbClr val="22282E"/>
-                </a:solidFill>
-              </a:rPr>
-              <a:t>•  ❓ ¿Puedo confiar en los ShellBags?</a:t>
+              <a:t>•  Con KAPE o FTK Imager, extrae de la imagen: C:\Windows\Prefetch, hives SYSTEM/SOFTWARE/NTUSER.DAT, Amcache.hve y C:\Windows\System32\winevt\Logs.</a:t>
+            </a:r>
+          </a:p>
+          <a:p>
+            <a:pPr>
+              <a:spcAft>
+                <a:spcPts val="600"/>
+              </a:spcAft>
+            </a:pPr>
+            <a:r>
+              <a:rPr sz="1500">
+                <a:solidFill>
+                  <a:srgbClr val="22282E"/>
+                </a:solidFill>
+              </a:rPr>
+              <a:t>•  Analiza Prefetch:</a:t>
+            </a:r>
+          </a:p>
+          <a:p>
+            <a:pPr>
+              <a:spcAft>
+                <a:spcPts val="600"/>
+              </a:spcAft>
+            </a:pPr>
+            <a:r>
+              <a:rPr sz="1500">
+                <a:solidFill>
+                  <a:srgbClr val="22282E"/>
+                </a:solidFill>
+              </a:rPr>
+              <a:t>•  Parsea ShimCache:</a:t>
+            </a:r>
+          </a:p>
+          <a:p>
+            <a:pPr>
+              <a:spcAft>
+                <a:spcPts val="600"/>
+              </a:spcAft>
+            </a:pPr>
+            <a:r>
+              <a:rPr sz="1500">
+                <a:solidFill>
+                  <a:srgbClr val="22282E"/>
+                </a:solidFill>
+              </a:rPr>
+              <a:t>•  Parsea AmCache:</a:t>
+            </a:r>
+          </a:p>
+          <a:p>
+            <a:pPr>
+              <a:spcAft>
+                <a:spcPts val="600"/>
+              </a:spcAft>
+            </a:pPr>
+            <a:r>
+              <a:rPr sz="1500">
+                <a:solidFill>
+                  <a:srgbClr val="22282E"/>
+                </a:solidFill>
+              </a:rPr>
+              <a:t>•  Analiza inicios de sesión en los Event Logs:</a:t>
+            </a:r>
+          </a:p>
+          <a:p>
+            <a:pPr>
+              <a:spcAft>
+                <a:spcPts val="600"/>
+              </a:spcAft>
+            </a:pPr>
+            <a:r>
+              <a:rPr sz="1500">
+                <a:solidFill>
+                  <a:srgbClr val="22282E"/>
+                </a:solidFill>
+              </a:rPr>
+              <a:t>•  Filtra los IDs 4624 (login), 4625 (fallo), 4688 (creación de proceso).</a:t>
+            </a:r>
+          </a:p>
+          <a:p>
+            <a:pPr>
+              <a:spcAft>
+                <a:spcPts val="600"/>
+              </a:spcAft>
+            </a:pPr>
+            <a:r>
+              <a:rPr sz="1500">
+                <a:solidFill>
+                  <a:srgbClr val="22282E"/>
+                </a:solidFill>
+              </a:rPr>
+              <a:t>•  Reconstruye actividad de usuario:</a:t>
             </a:r>
           </a:p>
         </p:txBody>
@@ -3526,7 +3516,7 @@
                   <a:srgbClr val="0B3D2E"/>
                 </a:solidFill>
               </a:rPr>
-              <a:t>🔗 Referencias</a:t>
+              <a:t>✍️ Ejercicios</a:t>
             </a:r>
           </a:p>
         </p:txBody>
@@ -3564,56 +3554,742 @@
                   <a:srgbClr val="22282E"/>
                 </a:solidFill>
               </a:rPr>
-              <a:t>•  Eric Zimmerman's Tools: &lt;https://ericzimmerman.github.io/&gt;</a:t>
-            </a:r>
-          </a:p>
-          <a:p>
-            <a:pPr>
-              <a:spcAft>
-                <a:spcPts val="600"/>
-              </a:spcAft>
-            </a:pPr>
-            <a:r>
-              <a:rPr sz="1500">
-                <a:solidFill>
-                  <a:srgbClr val="22282E"/>
-                </a:solidFill>
-              </a:rPr>
-              <a:t>•  RegRipper: &lt;https://github.com/keydet89/RegRipper3.0&gt;</a:t>
-            </a:r>
-          </a:p>
-          <a:p>
-            <a:pPr>
-              <a:spcAft>
-                <a:spcPts val="600"/>
-              </a:spcAft>
-            </a:pPr>
-            <a:r>
-              <a:rPr sz="1500">
-                <a:solidFill>
-                  <a:srgbClr val="22282E"/>
-                </a:solidFill>
-              </a:rPr>
-              <a:t>•  SANS — Windows Forensic Analysis poster (FOR500): &lt;https://www.sans.org/posters/&gt;</a:t>
-            </a:r>
-          </a:p>
-          <a:p>
-            <a:pPr>
-              <a:spcAft>
-                <a:spcPts val="600"/>
-              </a:spcAft>
-            </a:pPr>
-            <a:r>
-              <a:rPr sz="1500">
-                <a:solidFill>
-                  <a:srgbClr val="22282E"/>
-                </a:solidFill>
-              </a:rPr>
-              <a:t>•  Microsoft — Windows event IDs: &lt;https://learn.microsoft.com/windows/security/threat-protection/auditing/&gt;</a:t>
-            </a:r>
-          </a:p>
-        </p:txBody>
-      </p:sp>
+              <a:t>•  Explica qué prueba (y qué no) un archivo Prefetch.</a:t>
+            </a:r>
+          </a:p>
+          <a:p>
+            <a:pPr>
+              <a:spcAft>
+                <a:spcPts val="600"/>
+              </a:spcAft>
+            </a:pPr>
+            <a:r>
+              <a:rPr sz="1500">
+                <a:solidFill>
+                  <a:srgbClr val="22282E"/>
+                </a:solidFill>
+              </a:rPr>
+              <a:t>•  Diferencia ShimCache de AmCache y di cuándo usar cada uno.</a:t>
+            </a:r>
+          </a:p>
+          <a:p>
+            <a:pPr>
+              <a:spcAft>
+                <a:spcPts val="600"/>
+              </a:spcAft>
+            </a:pPr>
+            <a:r>
+              <a:rPr sz="1500">
+                <a:solidFill>
+                  <a:srgbClr val="22282E"/>
+                </a:solidFill>
+              </a:rPr>
+              <a:t>•  Lista cinco Event IDs clave y su significado.</a:t>
+            </a:r>
+          </a:p>
+          <a:p>
+            <a:pPr>
+              <a:spcAft>
+                <a:spcPts val="600"/>
+              </a:spcAft>
+            </a:pPr>
+            <a:r>
+              <a:rPr sz="1500">
+                <a:solidFill>
+                  <a:srgbClr val="22282E"/>
+                </a:solidFill>
+              </a:rPr>
+              <a:t>•  Analiza una Jump List propia y di qué archivos abriste.</a:t>
+            </a:r>
+          </a:p>
+          <a:p>
+            <a:pPr>
+              <a:spcAft>
+                <a:spcPts val="600"/>
+              </a:spcAft>
+            </a:pPr>
+            <a:r>
+              <a:rPr sz="1500">
+                <a:solidFill>
+                  <a:srgbClr val="22282E"/>
+                </a:solidFill>
+              </a:rPr>
+              <a:t>•  Evalúa si ShellBags conserva evidencia compatible con la visualización de una carpeta ya borrada y explica sus límites de atribución.</a:t>
+            </a:r>
+          </a:p>
+          <a:p>
+            <a:pPr>
+              <a:spcAft>
+                <a:spcPts val="600"/>
+              </a:spcAft>
+            </a:pPr>
+            <a:r>
+              <a:rPr sz="1500">
+                <a:solidFill>
+                  <a:srgbClr val="22282E"/>
+                </a:solidFill>
+              </a:rPr>
+              <a:t>•  Cruza tres artefactos para probar la ejecución de un binario concreto.</a:t>
+            </a:r>
+          </a:p>
+        </p:txBody>
+      </p:sp>
+    </p:spTree>
+  </p:cSld>
+  <p:clrMapOvr>
+    <a:masterClrMapping/>
+  </p:clrMapOvr>
+</p:sld>
+</file>
+
+<file path=ppt/slides/slide13.xml><?xml version="1.0" encoding="utf-8"?>
+<p:sld xmlns:a="http://schemas.openxmlformats.org/drawingml/2006/main" xmlns:p="http://schemas.openxmlformats.org/presentationml/2006/main" xmlns:r="http://schemas.openxmlformats.org/officeDocument/2006/relationships">
+  <p:cSld>
+    <p:spTree>
+      <p:nvGrpSpPr>
+        <p:cNvPr id="1" name=""/>
+        <p:cNvGrpSpPr/>
+        <p:nvPr/>
+      </p:nvGrpSpPr>
+      <p:grpSpPr/>
+      <p:sp>
+        <p:nvSpPr>
+          <p:cNvPr id="2" name="TextBox 1"/>
+          <p:cNvSpPr txBox="1"/>
+          <p:nvPr/>
+        </p:nvSpPr>
+        <p:spPr>
+          <a:xfrm>
+            <a:off x="457200" y="320040"/>
+            <a:ext cx="8229600" cy="822960"/>
+          </a:xfrm>
+          <a:prstGeom prst="rect">
+            <a:avLst/>
+          </a:prstGeom>
+          <a:noFill/>
+        </p:spPr>
+        <p:txBody>
+          <a:bodyPr wrap="square">
+            <a:spAutoFit/>
+          </a:bodyPr>
+          <a:lstStyle/>
+          <a:p>
+            <a:r>
+              <a:rPr sz="2600" b="1">
+                <a:solidFill>
+                  <a:srgbClr val="0B3D2E"/>
+                </a:solidFill>
+              </a:rPr>
+              <a:t>📝 Reto verificable</a:t>
+            </a:r>
+          </a:p>
+        </p:txBody>
+      </p:sp>
+      <p:sp>
+        <p:nvSpPr>
+          <p:cNvPr id="3" name="TextBox 2"/>
+          <p:cNvSpPr txBox="1"/>
+          <p:nvPr/>
+        </p:nvSpPr>
+        <p:spPr>
+          <a:xfrm>
+            <a:off x="457200" y="1280160"/>
+            <a:ext cx="8229600" cy="4937760"/>
+          </a:xfrm>
+          <a:prstGeom prst="rect">
+            <a:avLst/>
+          </a:prstGeom>
+          <a:noFill/>
+        </p:spPr>
+        <p:txBody>
+          <a:bodyPr wrap="square">
+            <a:spAutoFit/>
+          </a:bodyPr>
+          <a:lstStyle/>
+          <a:p>
+            <a:pPr>
+              <a:spcAft>
+                <a:spcPts val="600"/>
+              </a:spcAft>
+            </a:pPr>
+            <a:r>
+              <a:rPr sz="1500">
+                <a:solidFill>
+                  <a:srgbClr val="22282E"/>
+                </a:solidFill>
+              </a:rPr>
+              <a:t>•  En una VM Windows propia, ejecuta un binario "sospechoso" inofensivo (por ejemplo, una copia renombrada de calc.exe en una carpeta rara), luego sustenta la ejecución del experimento cruzando al menos…</a:t>
+            </a:r>
+          </a:p>
+          <a:p>
+            <a:pPr>
+              <a:spcAft>
+                <a:spcPts val="600"/>
+              </a:spcAft>
+            </a:pPr>
+            <a:r>
+              <a:rPr sz="1500">
+                <a:solidFill>
+                  <a:srgbClr val="22282E"/>
+                </a:solidFill>
+              </a:rPr>
+              <a:t>•  Criterio de aceptación: presentas evidencia de al menos tres fuentes distintas (Prefetch, ShimCache/AmCache, Event 4688, LNK…) que coinciden en nombre, ruta y ventana temporal del binario, con una…</a:t>
+            </a:r>
+          </a:p>
+        </p:txBody>
+      </p:sp>
+    </p:spTree>
+  </p:cSld>
+  <p:clrMapOvr>
+    <a:masterClrMapping/>
+  </p:clrMapOvr>
+</p:sld>
+</file>
+
+<file path=ppt/slides/slide14.xml><?xml version="1.0" encoding="utf-8"?>
+<p:sld xmlns:a="http://schemas.openxmlformats.org/drawingml/2006/main" xmlns:p="http://schemas.openxmlformats.org/presentationml/2006/main" xmlns:r="http://schemas.openxmlformats.org/officeDocument/2006/relationships">
+  <p:cSld>
+    <p:spTree>
+      <p:nvGrpSpPr>
+        <p:cNvPr id="1" name=""/>
+        <p:cNvGrpSpPr/>
+        <p:nvPr/>
+      </p:nvGrpSpPr>
+      <p:grpSpPr/>
+      <p:sp>
+        <p:nvSpPr>
+          <p:cNvPr id="2" name="TextBox 1"/>
+          <p:cNvSpPr txBox="1"/>
+          <p:nvPr/>
+        </p:nvSpPr>
+        <p:spPr>
+          <a:xfrm>
+            <a:off x="457200" y="320040"/>
+            <a:ext cx="8229600" cy="822960"/>
+          </a:xfrm>
+          <a:prstGeom prst="rect">
+            <a:avLst/>
+          </a:prstGeom>
+          <a:noFill/>
+        </p:spPr>
+        <p:txBody>
+          <a:bodyPr wrap="square">
+            <a:spAutoFit/>
+          </a:bodyPr>
+          <a:lstStyle/>
+          <a:p>
+            <a:r>
+              <a:rPr sz="2600" b="1">
+                <a:solidFill>
+                  <a:srgbClr val="0B3D2E"/>
+                </a:solidFill>
+              </a:rPr>
+              <a:t>⚠️ Errores comunes</a:t>
+            </a:r>
+          </a:p>
+        </p:txBody>
+      </p:sp>
+      <p:sp>
+        <p:nvSpPr>
+          <p:cNvPr id="3" name="TextBox 2"/>
+          <p:cNvSpPr txBox="1"/>
+          <p:nvPr/>
+        </p:nvSpPr>
+        <p:spPr>
+          <a:xfrm>
+            <a:off x="457200" y="1280160"/>
+            <a:ext cx="8229600" cy="4937760"/>
+          </a:xfrm>
+          <a:prstGeom prst="rect">
+            <a:avLst/>
+          </a:prstGeom>
+          <a:noFill/>
+        </p:spPr>
+        <p:txBody>
+          <a:bodyPr wrap="square">
+            <a:spAutoFit/>
+          </a:bodyPr>
+          <a:lstStyle/>
+          <a:p>
+            <a:pPr>
+              <a:spcAft>
+                <a:spcPts val="600"/>
+              </a:spcAft>
+            </a:pPr>
+            <a:r>
+              <a:rPr sz="1500">
+                <a:solidFill>
+                  <a:srgbClr val="22282E"/>
+                </a:solidFill>
+              </a:rPr>
+              <a:t>•  No hay Prefetch — Prefetch deshabilitado (común en servidores/SSD). Usa ShimCache/AmCache.</a:t>
+            </a:r>
+          </a:p>
+          <a:p>
+            <a:pPr>
+              <a:spcAft>
+                <a:spcPts val="600"/>
+              </a:spcAft>
+            </a:pPr>
+            <a:r>
+              <a:rPr sz="1500">
+                <a:solidFill>
+                  <a:srgbClr val="22282E"/>
+                </a:solidFill>
+              </a:rPr>
+              <a:t>•  ShimCache "desordenada" — Su orden no es estrictamente cronológico. No infieras tiempos exactos de ahí.</a:t>
+            </a:r>
+          </a:p>
+          <a:p>
+            <a:pPr>
+              <a:spcAft>
+                <a:spcPts val="600"/>
+              </a:spcAft>
+            </a:pPr>
+            <a:r>
+              <a:rPr sz="1500">
+                <a:solidFill>
+                  <a:srgbClr val="22282E"/>
+                </a:solidFill>
+              </a:rPr>
+              <a:t>•  Event Logs vacíos — Rotación o borrado. Busca en backups o en SIEM.</a:t>
+            </a:r>
+          </a:p>
+          <a:p>
+            <a:pPr>
+              <a:spcAft>
+                <a:spcPts val="600"/>
+              </a:spcAft>
+            </a:pPr>
+            <a:r>
+              <a:rPr sz="1500">
+                <a:solidFill>
+                  <a:srgbClr val="22282E"/>
+                </a:solidFill>
+              </a:rPr>
+              <a:t>•  Registry Explorer no abre el hive — Hive en uso o corrupto. Extrae la copia offline de la imagen.</a:t>
+            </a:r>
+          </a:p>
+          <a:p>
+            <a:pPr>
+              <a:spcAft>
+                <a:spcPts val="600"/>
+              </a:spcAft>
+            </a:pPr>
+            <a:r>
+              <a:rPr sz="1500">
+                <a:solidFill>
+                  <a:srgbClr val="22282E"/>
+                </a:solidFill>
+              </a:rPr>
+              <a:t>•  Timestamps en hora local confusa — Convierte todo a UTC con la zona horaria del sistema (hive SYSTEM).</a:t>
+            </a:r>
+          </a:p>
+        </p:txBody>
+      </p:sp>
+    </p:spTree>
+  </p:cSld>
+  <p:clrMapOvr>
+    <a:masterClrMapping/>
+  </p:clrMapOvr>
+</p:sld>
+</file>
+
+<file path=ppt/slides/slide15.xml><?xml version="1.0" encoding="utf-8"?>
+<p:sld xmlns:a="http://schemas.openxmlformats.org/drawingml/2006/main" xmlns:p="http://schemas.openxmlformats.org/presentationml/2006/main" xmlns:r="http://schemas.openxmlformats.org/officeDocument/2006/relationships">
+  <p:cSld>
+    <p:spTree>
+      <p:nvGrpSpPr>
+        <p:cNvPr id="1" name=""/>
+        <p:cNvGrpSpPr/>
+        <p:nvPr/>
+      </p:nvGrpSpPr>
+      <p:grpSpPr/>
+      <p:sp>
+        <p:nvSpPr>
+          <p:cNvPr id="2" name="TextBox 1"/>
+          <p:cNvSpPr txBox="1"/>
+          <p:nvPr/>
+        </p:nvSpPr>
+        <p:spPr>
+          <a:xfrm>
+            <a:off x="457200" y="320040"/>
+            <a:ext cx="8229600" cy="822960"/>
+          </a:xfrm>
+          <a:prstGeom prst="rect">
+            <a:avLst/>
+          </a:prstGeom>
+          <a:noFill/>
+        </p:spPr>
+        <p:txBody>
+          <a:bodyPr wrap="square">
+            <a:spAutoFit/>
+          </a:bodyPr>
+          <a:lstStyle/>
+          <a:p>
+            <a:r>
+              <a:rPr sz="2600" b="1">
+                <a:solidFill>
+                  <a:srgbClr val="0B3D2E"/>
+                </a:solidFill>
+              </a:rPr>
+              <a:t>❓ Preguntas frecuentes</a:t>
+            </a:r>
+          </a:p>
+        </p:txBody>
+      </p:sp>
+      <p:sp>
+        <p:nvSpPr>
+          <p:cNvPr id="3" name="TextBox 2"/>
+          <p:cNvSpPr txBox="1"/>
+          <p:nvPr/>
+        </p:nvSpPr>
+        <p:spPr>
+          <a:xfrm>
+            <a:off x="457200" y="1280160"/>
+            <a:ext cx="8229600" cy="4937760"/>
+          </a:xfrm>
+          <a:prstGeom prst="rect">
+            <a:avLst/>
+          </a:prstGeom>
+          <a:noFill/>
+        </p:spPr>
+        <p:txBody>
+          <a:bodyPr wrap="square">
+            <a:spAutoFit/>
+          </a:bodyPr>
+          <a:lstStyle/>
+          <a:p>
+            <a:pPr>
+              <a:spcAft>
+                <a:spcPts val="600"/>
+              </a:spcAft>
+            </a:pPr>
+            <a:r>
+              <a:rPr sz="1500">
+                <a:solidFill>
+                  <a:srgbClr val="22282E"/>
+                </a:solidFill>
+              </a:rPr>
+              <a:t>•  ❓ ¿Prefetch prueba ejecución?</a:t>
+            </a:r>
+          </a:p>
+          <a:p>
+            <a:pPr>
+              <a:spcAft>
+                <a:spcPts val="600"/>
+              </a:spcAft>
+            </a:pPr>
+            <a:r>
+              <a:rPr sz="1500">
+                <a:solidFill>
+                  <a:srgbClr val="22282E"/>
+                </a:solidFill>
+              </a:rPr>
+              <a:t>•  Es evidencia fuerte y contextual de que Windows procesó esa aplicación según el mecanismo de Prefetch, pero se valida versión, ruta, hash de nombre y otras fuentes antes de atribuir usuario o…</a:t>
+            </a:r>
+          </a:p>
+          <a:p>
+            <a:pPr>
+              <a:spcAft>
+                <a:spcPts val="600"/>
+              </a:spcAft>
+            </a:pPr>
+            <a:r>
+              <a:rPr sz="1500">
+                <a:solidFill>
+                  <a:srgbClr val="22282E"/>
+                </a:solidFill>
+              </a:rPr>
+              <a:t>•  ❓ ¿AmCache tiene hashes?</a:t>
+            </a:r>
+          </a:p>
+          <a:p>
+            <a:pPr>
+              <a:spcAft>
+                <a:spcPts val="600"/>
+              </a:spcAft>
+            </a:pPr>
+            <a:r>
+              <a:rPr sz="1500">
+                <a:solidFill>
+                  <a:srgbClr val="22282E"/>
+                </a:solidFill>
+              </a:rPr>
+              <a:t>•  Sí, SHA-1 de ejecutables, muy útil para contrastar contra inteligencia de amenazas.</a:t>
+            </a:r>
+          </a:p>
+          <a:p>
+            <a:pPr>
+              <a:spcAft>
+                <a:spcPts val="600"/>
+              </a:spcAft>
+            </a:pPr>
+            <a:r>
+              <a:rPr sz="1500">
+                <a:solidFill>
+                  <a:srgbClr val="22282E"/>
+                </a:solidFill>
+              </a:rPr>
+              <a:t>•  ❓ ¿Qué hive tiene la actividad del usuario?</a:t>
+            </a:r>
+          </a:p>
+          <a:p>
+            <a:pPr>
+              <a:spcAft>
+                <a:spcPts val="600"/>
+              </a:spcAft>
+            </a:pPr>
+            <a:r>
+              <a:rPr sz="1500">
+                <a:solidFill>
+                  <a:srgbClr val="22282E"/>
+                </a:solidFill>
+              </a:rPr>
+              <a:t>•  NTUSER.DAT (por perfil) y UsrClass.dat (ShellBags). SYSTEM/SOFTWARE son de máquina.</a:t>
+            </a:r>
+          </a:p>
+          <a:p>
+            <a:pPr>
+              <a:spcAft>
+                <a:spcPts val="600"/>
+              </a:spcAft>
+            </a:pPr>
+            <a:r>
+              <a:rPr sz="1500">
+                <a:solidFill>
+                  <a:srgbClr val="22282E"/>
+                </a:solidFill>
+              </a:rPr>
+              <a:t>•  ❓ ¿Puedo confiar en los ShellBags?</a:t>
+            </a:r>
+          </a:p>
+        </p:txBody>
+      </p:sp>
+    </p:spTree>
+  </p:cSld>
+  <p:clrMapOvr>
+    <a:masterClrMapping/>
+  </p:clrMapOvr>
+</p:sld>
+</file>
+
+<file path=ppt/slides/slide16.xml><?xml version="1.0" encoding="utf-8"?>
+<p:sld xmlns:a="http://schemas.openxmlformats.org/drawingml/2006/main" xmlns:p="http://schemas.openxmlformats.org/presentationml/2006/main" xmlns:r="http://schemas.openxmlformats.org/officeDocument/2006/relationships">
+  <p:cSld>
+    <p:spTree>
+      <p:nvGrpSpPr>
+        <p:cNvPr id="1" name=""/>
+        <p:cNvGrpSpPr/>
+        <p:nvPr/>
+      </p:nvGrpSpPr>
+      <p:grpSpPr/>
+      <p:sp>
+        <p:nvSpPr>
+          <p:cNvPr id="2" name="TextBox 1"/>
+          <p:cNvSpPr txBox="1"/>
+          <p:nvPr/>
+        </p:nvSpPr>
+        <p:spPr>
+          <a:xfrm>
+            <a:off x="457200" y="320040"/>
+            <a:ext cx="8229600" cy="822960"/>
+          </a:xfrm>
+          <a:prstGeom prst="rect">
+            <a:avLst/>
+          </a:prstGeom>
+          <a:noFill/>
+        </p:spPr>
+        <p:txBody>
+          <a:bodyPr wrap="square">
+            <a:spAutoFit/>
+          </a:bodyPr>
+          <a:lstStyle/>
+          <a:p>
+            <a:r>
+              <a:rPr sz="2600" b="1">
+                <a:solidFill>
+                  <a:srgbClr val="0B3D2E"/>
+                </a:solidFill>
+              </a:rPr>
+              <a:t>🔗 Referencias verificables y alcance</a:t>
+            </a:r>
+          </a:p>
+        </p:txBody>
+      </p:sp>
+      <p:sp>
+        <p:nvSpPr>
+          <p:cNvPr id="3" name="TextBox 2"/>
+          <p:cNvSpPr txBox="1"/>
+          <p:nvPr/>
+        </p:nvSpPr>
+        <p:spPr>
+          <a:xfrm>
+            <a:off x="457200" y="1280160"/>
+            <a:ext cx="8229600" cy="4937760"/>
+          </a:xfrm>
+          <a:prstGeom prst="rect">
+            <a:avLst/>
+          </a:prstGeom>
+          <a:noFill/>
+        </p:spPr>
+        <p:txBody>
+          <a:bodyPr wrap="square">
+            <a:spAutoFit/>
+          </a:bodyPr>
+          <a:lstStyle/>
+          <a:p>
+            <a:pPr>
+              <a:spcAft>
+                <a:spcPts val="600"/>
+              </a:spcAft>
+            </a:pPr>
+            <a:r>
+              <a:rPr sz="1500">
+                <a:solidFill>
+                  <a:srgbClr val="22282E"/>
+                </a:solidFill>
+              </a:rPr>
+              <a:t>•  🛠️ RootCause Windows Inspector (Apache-2.0) — sensor forense de comportamiento para Windows · lab: labs/rootcause-windows.</a:t>
+            </a:r>
+          </a:p>
+          <a:p>
+            <a:pPr>
+              <a:spcAft>
+                <a:spcPts val="600"/>
+              </a:spcAft>
+            </a:pPr>
+            <a:r>
+              <a:rPr sz="1500">
+                <a:solidFill>
+                  <a:srgbClr val="22282E"/>
+                </a:solidFill>
+              </a:rPr>
+              <a:t>•  Microsoft, auditoría de seguridad de Windows: fuente oficial para políticas y eventos nativos; un evento solo existe si la política y el canal lo generaron y conservaron —…</a:t>
+            </a:r>
+          </a:p>
+          <a:p>
+            <a:pPr>
+              <a:spcAft>
+                <a:spcPts val="600"/>
+              </a:spcAft>
+            </a:pPr>
+            <a:r>
+              <a:rPr sz="1500">
+                <a:solidFill>
+                  <a:srgbClr val="22282E"/>
+                </a:solidFill>
+              </a:rPr>
+              <a:t>•  Eric Zimmerman's Tools: documentación primaria de los parsers utilizados; la salida debe conservar versión y contrastarse con el artefacto original — &lt;https://ericzimmerman.github.io/&gt;</a:t>
+            </a:r>
+          </a:p>
+          <a:p>
+            <a:pPr>
+              <a:spcAft>
+                <a:spcPts val="600"/>
+              </a:spcAft>
+            </a:pPr>
+            <a:r>
+              <a:rPr sz="1500">
+                <a:solidFill>
+                  <a:srgbClr val="22282E"/>
+                </a:solidFill>
+              </a:rPr>
+              <a:t>•  RegRipper: repositorio oficial del framework de plugins para Registry — &lt;https://github.com/keydet89/RegRipper3.0&gt;</a:t>
+            </a:r>
+          </a:p>
+          <a:p>
+            <a:pPr>
+              <a:spcAft>
+                <a:spcPts val="600"/>
+              </a:spcAft>
+            </a:pPr>
+            <a:r>
+              <a:rPr sz="1500">
+                <a:solidFill>
+                  <a:srgbClr val="22282E"/>
+                </a:solidFill>
+              </a:rPr>
+              <a:t>•  SANS DFIR posters: material profesional de consulta rápida; no sustituye documentación de formato ni validación de artefactos — &lt;https://www.sans.org/posters/&gt;</a:t>
+            </a:r>
+          </a:p>
+        </p:txBody>
+      </p:sp>
+    </p:spTree>
+  </p:cSld>
+  <p:clrMapOvr>
+    <a:masterClrMapping/>
+  </p:clrMapOvr>
+</p:sld>
+</file>
+
+<file path=ppt/slides/slide17.xml><?xml version="1.0" encoding="utf-8"?>
+<p:sld xmlns:a="http://schemas.openxmlformats.org/drawingml/2006/main" xmlns:p="http://schemas.openxmlformats.org/presentationml/2006/main" xmlns:r="http://schemas.openxmlformats.org/officeDocument/2006/relationships">
+  <p:cSld>
+    <p:spTree>
+      <p:nvGrpSpPr>
+        <p:cNvPr id="1" name=""/>
+        <p:cNvGrpSpPr/>
+        <p:nvPr/>
+      </p:nvGrpSpPr>
+      <p:grpSpPr/>
+      <p:sp>
+        <p:nvSpPr>
+          <p:cNvPr id="2" name="TextBox 1"/>
+          <p:cNvSpPr txBox="1"/>
+          <p:nvPr/>
+        </p:nvSpPr>
+        <p:spPr>
+          <a:xfrm>
+            <a:off x="457200" y="274320"/>
+            <a:ext cx="8229600" cy="640080"/>
+          </a:xfrm>
+          <a:prstGeom prst="rect">
+            <a:avLst/>
+          </a:prstGeom>
+          <a:noFill/>
+        </p:spPr>
+        <p:txBody>
+          <a:bodyPr wrap="square">
+            <a:spAutoFit/>
+          </a:bodyPr>
+          <a:lstStyle/>
+          <a:p>
+            <a:r>
+              <a:rPr sz="2200" b="1">
+                <a:solidFill>
+                  <a:srgbClr val="0B3D2E"/>
+                </a:solidFill>
+              </a:rPr>
+              <a:t>Diagrama de la clase</a:t>
+            </a:r>
+          </a:p>
+        </p:txBody>
+      </p:sp>
+      <p:pic>
+        <p:nvPicPr>
+          <p:cNvPr id="3" name="Picture 2" descr="556a399685d3a1b7.png"/>
+          <p:cNvPicPr>
+            <a:picLocks noChangeAspect="1"/>
+          </p:cNvPicPr>
+          <p:nvPr/>
+        </p:nvPicPr>
+        <p:blipFill>
+          <a:blip r:embed="rId2"/>
+          <a:stretch>
+            <a:fillRect/>
+          </a:stretch>
+        </p:blipFill>
+        <p:spPr>
+          <a:xfrm>
+            <a:off x="457200" y="1201533"/>
+            <a:ext cx="8229600" cy="5095013"/>
+          </a:xfrm>
+          <a:prstGeom prst="rect">
+            <a:avLst/>
+          </a:prstGeom>
+        </p:spPr>
+      </p:pic>
     </p:spTree>
   </p:cSld>
   <p:clrMapOvr>
@@ -3698,7 +4374,7 @@
                   <a:srgbClr val="22282E"/>
                 </a:solidFill>
               </a:rPr>
-              <a:t>•  Aprender a extraer e interpretar los artefactos que Windows deja de la actividad del usuario y del sistema: registro (hives), Prefetch, ShimCache/AmCache, Jump Lists, LNK, Event Logs y ShellBags. Al terminar podrás responder "quién ejecutó qué, cuándo y desde dónde" en un equipo Windows.</a:t>
+              <a:t>•  Aprender a extraer e interpretar los artefactos que Windows deja de la actividad del usuario y del sistema: registro (hives), Prefetch, ShimCache/AmCache, Jump Lists, LNK, Event Logs y ShellBags. Al…</a:t>
             </a:r>
           </a:p>
         </p:txBody>
@@ -4092,7 +4768,7 @@
                   <a:srgbClr val="0B3D2E"/>
                 </a:solidFill>
               </a:rPr>
-              <a:t>📖 Definiciones y características</a:t>
+              <a:t>🧠 Explicación en profundidad</a:t>
             </a:r>
           </a:p>
         </p:txBody>
@@ -4130,97 +4806,97 @@
                   <a:srgbClr val="22282E"/>
                 </a:solidFill>
               </a:rPr>
-              <a:t>•  Hive del registro: archivo binario (SYSTEM, SOFTWARE, NTUSER.DAT…) con configuración y rastros. Característica: NTUSER.DAT es por usuario.</a:t>
-            </a:r>
-          </a:p>
-          <a:p>
-            <a:pPr>
-              <a:spcAft>
-                <a:spcPts val="600"/>
-              </a:spcAft>
-            </a:pPr>
-            <a:r>
-              <a:rPr sz="1500">
-                <a:solidFill>
-                  <a:srgbClr val="22282E"/>
-                </a:solidFill>
-              </a:rPr>
-              <a:t>•  Prefetch: archivos .pf en C:\Windows\Prefetch que aceleran arranque de apps. Característica: registran nombre, conteo y última ejecución.</a:t>
-            </a:r>
-          </a:p>
-          <a:p>
-            <a:pPr>
-              <a:spcAft>
-                <a:spcPts val="600"/>
-              </a:spcAft>
-            </a:pPr>
-            <a:r>
-              <a:rPr sz="1500">
-                <a:solidFill>
-                  <a:srgbClr val="22282E"/>
-                </a:solidFill>
-              </a:rPr>
-              <a:t>•  ShimCache (AppCompatCache): caché de compatibilidad en el hive SYSTEM. Característica: evidencia de ejecución/presencia, orden no siempre cronológico.</a:t>
-            </a:r>
-          </a:p>
-          <a:p>
-            <a:pPr>
-              <a:spcAft>
-                <a:spcPts val="600"/>
-              </a:spcAft>
-            </a:pPr>
-            <a:r>
-              <a:rPr sz="1500">
-                <a:solidFill>
-                  <a:srgbClr val="22282E"/>
-                </a:solidFill>
-              </a:rPr>
-              <a:t>•  AmCache.hve: hive con hashes SHA-1 y rutas de ejecutables. Característica: útil para identificar binarios maliciosos.</a:t>
-            </a:r>
-          </a:p>
-          <a:p>
-            <a:pPr>
-              <a:spcAft>
-                <a:spcPts val="600"/>
-              </a:spcAft>
-            </a:pPr>
-            <a:r>
-              <a:rPr sz="1500">
-                <a:solidFill>
-                  <a:srgbClr val="22282E"/>
-                </a:solidFill>
-              </a:rPr>
-              <a:t>•  Event Log 4624/4625: inicio de sesión exitoso/fallido. Característica: base del análisis de autenticación.</a:t>
-            </a:r>
-          </a:p>
-          <a:p>
-            <a:pPr>
-              <a:spcAft>
-                <a:spcPts val="600"/>
-              </a:spcAft>
-            </a:pPr>
-            <a:r>
-              <a:rPr sz="1500">
-                <a:solidFill>
-                  <a:srgbClr val="22282E"/>
-                </a:solidFill>
-              </a:rPr>
-              <a:t>•  Jump List: historial de archivos por aplicación en la barra de tareas. Característica: revela archivos abiertos recientemente.</a:t>
-            </a:r>
-          </a:p>
-          <a:p>
-            <a:pPr>
-              <a:spcAft>
-                <a:spcPts val="600"/>
-              </a:spcAft>
-            </a:pPr>
-            <a:r>
-              <a:rPr sz="1500">
-                <a:solidFill>
-                  <a:srgbClr val="22282E"/>
-                </a:solidFill>
-              </a:rPr>
-              <a:t>•  ShellBags: preferencias de vista de carpetas en el registro. Característica: prueban que una carpeta fue navegada, incluso si ya no existe.</a:t>
+              <a:t>•  Un artefacto de Windows es un subproducto de una función del sistema, no un testigo perfecto. Prefetch puede apoyar ejecución, Amcache inventario o presencia y LNK/Jump Lists interacción con rutas…</a:t>
+            </a:r>
+          </a:p>
+          <a:p>
+            <a:pPr>
+              <a:spcAft>
+                <a:spcPts val="600"/>
+              </a:spcAft>
+            </a:pPr>
+            <a:r>
+              <a:rPr sz="1500">
+                <a:solidFill>
+                  <a:srgbClr val="22282E"/>
+                </a:solidFill>
+              </a:rPr>
+              <a:t>•  Los hives de registro se asocian a sistema o perfil; se conserva su contexto y logs transaccionales. Los timestamps pueden reflejar creación, modificación, primer o último uso según artefacto. La…</a:t>
+            </a:r>
+          </a:p>
+          <a:p>
+            <a:pPr>
+              <a:spcAft>
+                <a:spcPts val="600"/>
+              </a:spcAft>
+            </a:pPr>
+            <a:r>
+              <a:rPr sz="1500">
+                <a:solidFill>
+                  <a:srgbClr val="22282E"/>
+                </a:solidFill>
+              </a:rPr>
+              <a:t>•  SYSTEM, SOFTWARE, SAM y SECURITY describen configuración del equipo; NTUSER.DAT y USRCLASS.DAT pertenecen a perfiles. Una clave necesita hive, ruta, valor y last-write time. Ese tiempo suele…</a:t>
+            </a:r>
+          </a:p>
+          <a:p>
+            <a:pPr>
+              <a:spcAft>
+                <a:spcPts val="600"/>
+              </a:spcAft>
+            </a:pPr>
+            <a:r>
+              <a:rPr sz="1500">
+                <a:solidFill>
+                  <a:srgbClr val="22282E"/>
+                </a:solidFill>
+              </a:rPr>
+              <a:t>•  Prefetch puede aportar nombre, rutas referenciadas, conteo y tiempos según versión/configuración, y es consistente con ejecución del programa observado. Amcache y Shimcache tienen propósitos de…</a:t>
+            </a:r>
+          </a:p>
+          <a:p>
+            <a:pPr>
+              <a:spcAft>
+                <a:spcPts val="600"/>
+              </a:spcAft>
+            </a:pPr>
+            <a:r>
+              <a:rPr sz="1500">
+                <a:solidFill>
+                  <a:srgbClr val="22282E"/>
+                </a:solidFill>
+              </a:rPr>
+              <a:t>•  Por ejemplo, un ejecutable aparece en Amcache, una LNK apunta a su ubicación y Prefetch contiene un registro asociado. Juntos fortalecen la hipótesis de presencia e interacción, pero la afirmación…</a:t>
+            </a:r>
+          </a:p>
+          <a:p>
+            <a:pPr>
+              <a:spcAft>
+                <a:spcPts val="600"/>
+              </a:spcAft>
+            </a:pPr>
+            <a:r>
+              <a:rPr sz="1500">
+                <a:solidFill>
+                  <a:srgbClr val="22282E"/>
+                </a:solidFill>
+              </a:rPr>
+              <a:t>•  Prefetch puede estar deshabilitado o limpiado; Jump Lists dependen de usuario y aplicación; Event Logs rotan; un perfil puede no haberse cargado. Ausencia no equivale a «nunca ocurrió». Primero se…</a:t>
+            </a:r>
+          </a:p>
+          <a:p>
+            <a:pPr>
+              <a:spcAft>
+                <a:spcPts val="600"/>
+              </a:spcAft>
+            </a:pPr>
+            <a:r>
+              <a:rPr sz="1500">
+                <a:solidFill>
+                  <a:srgbClr val="22282E"/>
+                </a:solidFill>
+              </a:rPr>
+              <a:t>•  El diagrama muestra convergencia porque cada fuente responde una fracción: Registry configura y conserva uso; Prefetch/Amcache apoyan presencia o ejecución; LNK/Jump Lists conectan rutas y usuario…</a:t>
             </a:r>
           </a:p>
         </p:txBody>
@@ -4271,7 +4947,7 @@
                   <a:srgbClr val="0B3D2E"/>
                 </a:solidFill>
               </a:rPr>
-              <a:t>🧰 Herramientas y preparación</a:t>
+              <a:t>📔 Glosario</a:t>
             </a:r>
           </a:p>
         </p:txBody>
@@ -4309,52 +4985,97 @@
                   <a:srgbClr val="22282E"/>
                 </a:solidFill>
               </a:rPr>
-              <a:t>•  Eric Zimmerman's Tools: PECmd (Prefetch), AppCompatCacheParser, AmcacheParser, JLECmd, LECmd, SBECmd, EvtxECmd, Registry Explorer.</a:t>
-            </a:r>
-          </a:p>
-          <a:p>
-            <a:pPr>
-              <a:spcAft>
-                <a:spcPts val="600"/>
-              </a:spcAft>
-            </a:pPr>
-            <a:r>
-              <a:rPr sz="1500">
-                <a:solidFill>
-                  <a:srgbClr val="22282E"/>
-                </a:solidFill>
-              </a:rPr>
-              <a:t>•  RegRipper: parseo masivo de hives.</a:t>
-            </a:r>
-          </a:p>
-          <a:p>
-            <a:pPr>
-              <a:spcAft>
-                <a:spcPts val="600"/>
-              </a:spcAft>
-            </a:pPr>
-            <a:r>
-              <a:rPr sz="1500">
-                <a:solidFill>
-                  <a:srgbClr val="22282E"/>
-                </a:solidFill>
-              </a:rPr>
-              <a:t>•  Extracción: FTK Imager o KAPE para volcar los artefactos de una imagen montada en solo lectura.</a:t>
-            </a:r>
-          </a:p>
-          <a:p>
-            <a:pPr>
-              <a:spcAft>
-                <a:spcPts val="600"/>
-              </a:spcAft>
-            </a:pPr>
-            <a:r>
-              <a:rPr sz="1500">
-                <a:solidFill>
-                  <a:srgbClr val="22282E"/>
-                </a:solidFill>
-              </a:rPr>
-              <a:t>•  Entorno: usa una imagen de una VM Windows PROPIA donde tú generaste la actividad.</a:t>
+              <a:t>•  Registry hive: archivo que almacena una rama del registro.</a:t>
+            </a:r>
+          </a:p>
+          <a:p>
+            <a:pPr>
+              <a:spcAft>
+                <a:spcPts val="600"/>
+              </a:spcAft>
+            </a:pPr>
+            <a:r>
+              <a:rPr sz="1500">
+                <a:solidFill>
+                  <a:srgbClr val="22282E"/>
+                </a:solidFill>
+              </a:rPr>
+              <a:t>•  Prefetch: optimización que conserva metadatos de ejecución.</a:t>
+            </a:r>
+          </a:p>
+          <a:p>
+            <a:pPr>
+              <a:spcAft>
+                <a:spcPts val="600"/>
+              </a:spcAft>
+            </a:pPr>
+            <a:r>
+              <a:rPr sz="1500">
+                <a:solidFill>
+                  <a:srgbClr val="22282E"/>
+                </a:solidFill>
+              </a:rPr>
+              <a:t>•  Amcache: artefacto de inventario y compatibilidad.</a:t>
+            </a:r>
+          </a:p>
+          <a:p>
+            <a:pPr>
+              <a:spcAft>
+                <a:spcPts val="600"/>
+              </a:spcAft>
+            </a:pPr>
+            <a:r>
+              <a:rPr sz="1500">
+                <a:solidFill>
+                  <a:srgbClr val="22282E"/>
+                </a:solidFill>
+              </a:rPr>
+              <a:t>•  Shimcache: caché de compatibilidad de aplicaciones.</a:t>
+            </a:r>
+          </a:p>
+          <a:p>
+            <a:pPr>
+              <a:spcAft>
+                <a:spcPts val="600"/>
+              </a:spcAft>
+            </a:pPr>
+            <a:r>
+              <a:rPr sz="1500">
+                <a:solidFill>
+                  <a:srgbClr val="22282E"/>
+                </a:solidFill>
+              </a:rPr>
+              <a:t>•  LNK: acceso directo con metadatos de destino.</a:t>
+            </a:r>
+          </a:p>
+          <a:p>
+            <a:pPr>
+              <a:spcAft>
+                <a:spcPts val="600"/>
+              </a:spcAft>
+            </a:pPr>
+            <a:r>
+              <a:rPr sz="1500">
+                <a:solidFill>
+                  <a:srgbClr val="22282E"/>
+                </a:solidFill>
+              </a:rPr>
+              <a:t>•  Jump List: historial de elementos asociados a una aplicación.</a:t>
+            </a:r>
+          </a:p>
+          <a:p>
+            <a:pPr>
+              <a:spcAft>
+                <a:spcPts val="600"/>
+              </a:spcAft>
+            </a:pPr>
+            <a:r>
+              <a:rPr sz="1500">
+                <a:solidFill>
+                  <a:srgbClr val="22282E"/>
+                </a:solidFill>
+              </a:rPr>
+              <a:t>•  Corroboración: apoyo de una afirmación mediante fuentes independientes.</a:t>
             </a:r>
           </a:p>
         </p:txBody>
@@ -4405,7 +5126,7 @@
                   <a:srgbClr val="0B3D2E"/>
                 </a:solidFill>
               </a:rPr>
-              <a:t>🧪 Laboratorio guiado</a:t>
+              <a:t>📖 Definiciones y características</a:t>
             </a:r>
           </a:p>
         </p:txBody>
@@ -4443,97 +5164,97 @@
                   <a:srgbClr val="22282E"/>
                 </a:solidFill>
               </a:rPr>
-              <a:t>•  Con KAPE o FTK Imager, extrae de la imagen: C:\Windows\Prefetch, hives SYSTEM/SOFTWARE/NTUSER.DAT, Amcache.hve y C:\Windows\System32\winevt\Logs.</a:t>
-            </a:r>
-          </a:p>
-          <a:p>
-            <a:pPr>
-              <a:spcAft>
-                <a:spcPts val="600"/>
-              </a:spcAft>
-            </a:pPr>
-            <a:r>
-              <a:rPr sz="1500">
-                <a:solidFill>
-                  <a:srgbClr val="22282E"/>
-                </a:solidFill>
-              </a:rPr>
-              <a:t>•  Analiza Prefetch:</a:t>
-            </a:r>
-          </a:p>
-          <a:p>
-            <a:pPr>
-              <a:spcAft>
-                <a:spcPts val="600"/>
-              </a:spcAft>
-            </a:pPr>
-            <a:r>
-              <a:rPr sz="1500">
-                <a:solidFill>
-                  <a:srgbClr val="22282E"/>
-                </a:solidFill>
-              </a:rPr>
-              <a:t>•  PECmd.exe -d Prefetch --csv salida --csvf prefetch.csv</a:t>
-            </a:r>
-          </a:p>
-          <a:p>
-            <a:pPr>
-              <a:spcAft>
-                <a:spcPts val="600"/>
-              </a:spcAft>
-            </a:pPr>
-            <a:r>
-              <a:rPr sz="1500">
-                <a:solidFill>
-                  <a:srgbClr val="22282E"/>
-                </a:solidFill>
-              </a:rPr>
-              <a:t>•  Parsea ShimCache:</a:t>
-            </a:r>
-          </a:p>
-          <a:p>
-            <a:pPr>
-              <a:spcAft>
-                <a:spcPts val="600"/>
-              </a:spcAft>
-            </a:pPr>
-            <a:r>
-              <a:rPr sz="1500">
-                <a:solidFill>
-                  <a:srgbClr val="22282E"/>
-                </a:solidFill>
-              </a:rPr>
-              <a:t>•  AppCompatCacheParser.exe -f SYSTEM --csv salida</a:t>
-            </a:r>
-          </a:p>
-          <a:p>
-            <a:pPr>
-              <a:spcAft>
-                <a:spcPts val="600"/>
-              </a:spcAft>
-            </a:pPr>
-            <a:r>
-              <a:rPr sz="1500">
-                <a:solidFill>
-                  <a:srgbClr val="22282E"/>
-                </a:solidFill>
-              </a:rPr>
-              <a:t>•  Parsea AmCache:</a:t>
-            </a:r>
-          </a:p>
-          <a:p>
-            <a:pPr>
-              <a:spcAft>
-                <a:spcPts val="600"/>
-              </a:spcAft>
-            </a:pPr>
-            <a:r>
-              <a:rPr sz="1500">
-                <a:solidFill>
-                  <a:srgbClr val="22282E"/>
-                </a:solidFill>
-              </a:rPr>
-              <a:t>•  AmcacheParser.exe -f Amcache.hve --csv salida</a:t>
+              <a:t>•  Hive del registro: archivo binario (SYSTEM, SOFTWARE, NTUSER.DAT…) con configuración y rastros. Característica: NTUSER.DAT es por usuario.</a:t>
+            </a:r>
+          </a:p>
+          <a:p>
+            <a:pPr>
+              <a:spcAft>
+                <a:spcPts val="600"/>
+              </a:spcAft>
+            </a:pPr>
+            <a:r>
+              <a:rPr sz="1500">
+                <a:solidFill>
+                  <a:srgbClr val="22282E"/>
+                </a:solidFill>
+              </a:rPr>
+              <a:t>•  Prefetch: archivos .pf que apoyan optimización de carga cuando la función está habilitada. Característica: pueden contener nombre, rutas, conteos y tiempos cuya cantidad y semántica dependen de…</a:t>
+            </a:r>
+          </a:p>
+          <a:p>
+            <a:pPr>
+              <a:spcAft>
+                <a:spcPts val="600"/>
+              </a:spcAft>
+            </a:pPr>
+            <a:r>
+              <a:rPr sz="1500">
+                <a:solidFill>
+                  <a:srgbClr val="22282E"/>
+                </a:solidFill>
+              </a:rPr>
+              <a:t>•  ShimCache (AppCompatCache): datos de compatibilidad mantenidos en SYSTEM. Característica: pueden apoyar presencia o interacción; no forman un historial inequívoco de ejecución.</a:t>
+            </a:r>
+          </a:p>
+          <a:p>
+            <a:pPr>
+              <a:spcAft>
+                <a:spcPts val="600"/>
+              </a:spcAft>
+            </a:pPr>
+            <a:r>
+              <a:rPr sz="1500">
+                <a:solidFill>
+                  <a:srgbClr val="22282E"/>
+                </a:solidFill>
+              </a:rPr>
+              <a:t>•  AmCache.hve: hive de inventario y compatibilidad con rutas y propiedades de archivos. Característica: ayuda a identificar objetos, pero su presencia no basta para afirmar ejecución.</a:t>
+            </a:r>
+          </a:p>
+          <a:p>
+            <a:pPr>
+              <a:spcAft>
+                <a:spcPts val="600"/>
+              </a:spcAft>
+            </a:pPr>
+            <a:r>
+              <a:rPr sz="1500">
+                <a:solidFill>
+                  <a:srgbClr val="22282E"/>
+                </a:solidFill>
+              </a:rPr>
+              <a:t>•  Event Log 4624/4625: inicio de sesión exitoso/fallido. Característica: base del análisis de autenticación.</a:t>
+            </a:r>
+          </a:p>
+          <a:p>
+            <a:pPr>
+              <a:spcAft>
+                <a:spcPts val="600"/>
+              </a:spcAft>
+            </a:pPr>
+            <a:r>
+              <a:rPr sz="1500">
+                <a:solidFill>
+                  <a:srgbClr val="22282E"/>
+                </a:solidFill>
+              </a:rPr>
+              <a:t>•  Jump List: historial de archivos por aplicación en la barra de tareas. Característica: revela archivos abiertos recientemente.</a:t>
+            </a:r>
+          </a:p>
+          <a:p>
+            <a:pPr>
+              <a:spcAft>
+                <a:spcPts val="600"/>
+              </a:spcAft>
+            </a:pPr>
+            <a:r>
+              <a:rPr sz="1500">
+                <a:solidFill>
+                  <a:srgbClr val="22282E"/>
+                </a:solidFill>
+              </a:rPr>
+              <a:t>•  ShellBags: datos de vista y navegación del shell en hives de usuario. Característica: pueden apoyar interacción con rutas, incluso si ya no existen; requieren contexto de perfil y parser.</a:t>
             </a:r>
           </a:p>
         </p:txBody>
@@ -4584,7 +5305,7 @@
                   <a:srgbClr val="0B3D2E"/>
                 </a:solidFill>
               </a:rPr>
-              <a:t>✍️ Ejercicios</a:t>
+              <a:t>🔍 Caso razonado — utilidad remota en un perfil de usuario</a:t>
             </a:r>
           </a:p>
         </p:txBody>
@@ -4622,82 +5343,22 @@
                   <a:srgbClr val="22282E"/>
                 </a:solidFill>
               </a:rPr>
-              <a:t>•  Explica qué prueba (y qué no) un archivo Prefetch.</a:t>
-            </a:r>
-          </a:p>
-          <a:p>
-            <a:pPr>
-              <a:spcAft>
-                <a:spcPts val="600"/>
-              </a:spcAft>
-            </a:pPr>
-            <a:r>
-              <a:rPr sz="1500">
-                <a:solidFill>
-                  <a:srgbClr val="22282E"/>
-                </a:solidFill>
-              </a:rPr>
-              <a:t>•  Diferencia ShimCache de AmCache y di cuándo usar cada uno.</a:t>
-            </a:r>
-          </a:p>
-          <a:p>
-            <a:pPr>
-              <a:spcAft>
-                <a:spcPts val="600"/>
-              </a:spcAft>
-            </a:pPr>
-            <a:r>
-              <a:rPr sz="1500">
-                <a:solidFill>
-                  <a:srgbClr val="22282E"/>
-                </a:solidFill>
-              </a:rPr>
-              <a:t>•  Lista cinco Event IDs clave y su significado.</a:t>
-            </a:r>
-          </a:p>
-          <a:p>
-            <a:pPr>
-              <a:spcAft>
-                <a:spcPts val="600"/>
-              </a:spcAft>
-            </a:pPr>
-            <a:r>
-              <a:rPr sz="1500">
-                <a:solidFill>
-                  <a:srgbClr val="22282E"/>
-                </a:solidFill>
-              </a:rPr>
-              <a:t>•  Analiza una Jump List propia y di qué archivos abriste.</a:t>
-            </a:r>
-          </a:p>
-          <a:p>
-            <a:pPr>
-              <a:spcAft>
-                <a:spcPts val="600"/>
-              </a:spcAft>
-            </a:pPr>
-            <a:r>
-              <a:rPr sz="1500">
-                <a:solidFill>
-                  <a:srgbClr val="22282E"/>
-                </a:solidFill>
-              </a:rPr>
-              <a:t>•  Demuestra con ShellBags que navegaste una carpeta ya borrada.</a:t>
-            </a:r>
-          </a:p>
-          <a:p>
-            <a:pPr>
-              <a:spcAft>
-                <a:spcPts val="600"/>
-              </a:spcAft>
-            </a:pPr>
-            <a:r>
-              <a:rPr sz="1500">
-                <a:solidFill>
-                  <a:srgbClr val="22282E"/>
-                </a:solidFill>
-              </a:rPr>
-              <a:t>•  Cruza tres artefactos para probar la ejecución de un binario concreto.</a:t>
+              <a:t>•  remote.exe aparece en Amcache con una ruta del perfil. Una Jump List refiere un archivo abierto desde un share y una LNK conserva volumen y ruta. Prefetch existe para el ejecutable y EVTX registra…</a:t>
+            </a:r>
+          </a:p>
+          <a:p>
+            <a:pPr>
+              <a:spcAft>
+                <a:spcPts val="600"/>
+              </a:spcAft>
+            </a:pPr>
+            <a:r>
+              <a:rPr sz="1500">
+                <a:solidFill>
+                  <a:srgbClr val="22282E"/>
+                </a:solidFill>
+              </a:rPr>
+              <a:t>•  La conclusión no nace de contar artefactos, sino de alinear entidad, significado y tiempo. Si Prefetch está ausente, primero se revisan edición, configuración y retención. Si los tiempos difieren, se…</a:t>
             </a:r>
           </a:p>
         </p:txBody>
@@ -4748,7 +5409,7 @@
                   <a:srgbClr val="0B3D2E"/>
                 </a:solidFill>
               </a:rPr>
-              <a:t>📝 Reto verificable</a:t>
+              <a:t>✅ Criterio de dominio</a:t>
             </a:r>
           </a:p>
         </p:txBody>
@@ -4786,22 +5447,7 @@
                   <a:srgbClr val="22282E"/>
                 </a:solidFill>
               </a:rPr>
-              <a:t>•  En una VM Windows propia, ejecuta un binario "sospechoso" inofensivo (por ejemplo, una copia renombrada de calc.exe en una carpeta rara), luego demuestra su ejecución cruzando al menos tres artefactos independientes.</a:t>
-            </a:r>
-          </a:p>
-          <a:p>
-            <a:pPr>
-              <a:spcAft>
-                <a:spcPts val="600"/>
-              </a:spcAft>
-            </a:pPr>
-            <a:r>
-              <a:rPr sz="1500">
-                <a:solidFill>
-                  <a:srgbClr val="22282E"/>
-                </a:solidFill>
-              </a:rPr>
-              <a:t>•  Criterio de aceptación: presentas evidencia de al menos tres fuentes distintas (Prefetch, ShimCache/AmCache, Event 4688, LNK…) que coinciden en nombre, ruta y ventana temporal del binario, con una conclusión escrita.</a:t>
+              <a:t>•  El alumno formula una hipótesis de ejecución o interacción con al menos tres artefactos independientes, explica qué produce cada uno y propone alternativas. Presentar Shimcache o Amcache como…</a:t>
             </a:r>
           </a:p>
         </p:txBody>
